--- a/canvas/avc248/slides/week-11-interview-skills.pptx
+++ b/canvas/avc248/slides/week-11-interview-skills.pptx
@@ -1606,6 +1606,10 @@
           </a:solidFill>
           <a:ln/>
         </p:spPr>
+        <p:txBody>
+          <a:bodyPr/>
+          <a:p/>
+        </p:txBody>
       </p:sp>
       <p:sp>
         <p:nvSpPr>
@@ -1626,6 +1630,10 @@
           </a:solidFill>
           <a:ln/>
         </p:spPr>
+        <p:txBody>
+          <a:bodyPr/>
+          <a:p/>
+        </p:txBody>
       </p:sp>
       <p:sp>
         <p:nvSpPr>
@@ -1646,6 +1654,10 @@
           </a:solidFill>
           <a:ln/>
         </p:spPr>
+        <p:txBody>
+          <a:bodyPr/>
+          <a:p/>
+        </p:txBody>
       </p:sp>
       <p:sp>
         <p:nvSpPr>
@@ -1838,6 +1850,10 @@
           </a:solidFill>
           <a:ln/>
         </p:spPr>
+        <p:txBody>
+          <a:bodyPr/>
+          <a:p/>
+        </p:txBody>
       </p:sp>
       <p:sp>
         <p:nvSpPr>
@@ -1990,6 +2006,10 @@
             </a:outerShdw>
           </a:effectLst>
         </p:spPr>
+        <p:txBody>
+          <a:bodyPr/>
+          <a:p/>
+        </p:txBody>
       </p:sp>
       <p:sp>
         <p:nvSpPr>
@@ -2010,6 +2030,10 @@
           </a:solidFill>
           <a:ln/>
         </p:spPr>
+        <p:txBody>
+          <a:bodyPr/>
+          <a:p/>
+        </p:txBody>
       </p:sp>
       <p:pic>
         <p:nvPicPr>
@@ -2135,6 +2159,10 @@
           </a:solidFill>
           <a:ln/>
         </p:spPr>
+        <p:txBody>
+          <a:bodyPr/>
+          <a:p/>
+        </p:txBody>
       </p:sp>
       <p:sp>
         <p:nvSpPr>
@@ -2155,6 +2183,10 @@
           </a:solidFill>
           <a:ln/>
         </p:spPr>
+        <p:txBody>
+          <a:bodyPr/>
+          <a:p/>
+        </p:txBody>
       </p:sp>
       <p:sp>
         <p:nvSpPr>
@@ -2175,6 +2207,10 @@
           </a:solidFill>
           <a:ln/>
         </p:spPr>
+        <p:txBody>
+          <a:bodyPr/>
+          <a:p/>
+        </p:txBody>
       </p:sp>
       <p:pic>
         <p:nvPicPr>
@@ -2332,6 +2368,10 @@
           </a:solidFill>
           <a:ln/>
         </p:spPr>
+        <p:txBody>
+          <a:bodyPr/>
+          <a:p/>
+        </p:txBody>
       </p:sp>
       <p:sp>
         <p:nvSpPr>
@@ -2484,6 +2524,10 @@
             </a:outerShdw>
           </a:effectLst>
         </p:spPr>
+        <p:txBody>
+          <a:bodyPr/>
+          <a:p/>
+        </p:txBody>
       </p:sp>
       <p:sp>
         <p:nvSpPr>
@@ -2504,6 +2548,10 @@
           </a:solidFill>
           <a:ln/>
         </p:spPr>
+        <p:txBody>
+          <a:bodyPr/>
+          <a:p/>
+        </p:txBody>
       </p:sp>
       <p:pic>
         <p:nvPicPr>
@@ -2641,6 +2689,10 @@
             </a:outerShdw>
           </a:effectLst>
         </p:spPr>
+        <p:txBody>
+          <a:bodyPr/>
+          <a:p/>
+        </p:txBody>
       </p:sp>
       <p:sp>
         <p:nvSpPr>
@@ -2661,6 +2713,10 @@
           </a:solidFill>
           <a:ln/>
         </p:spPr>
+        <p:txBody>
+          <a:bodyPr/>
+          <a:p/>
+        </p:txBody>
       </p:sp>
       <p:pic>
         <p:nvPicPr>
@@ -2798,6 +2854,10 @@
             </a:outerShdw>
           </a:effectLst>
         </p:spPr>
+        <p:txBody>
+          <a:bodyPr/>
+          <a:p/>
+        </p:txBody>
       </p:sp>
       <p:sp>
         <p:nvSpPr>
@@ -2818,6 +2878,10 @@
           </a:solidFill>
           <a:ln/>
         </p:spPr>
+        <p:txBody>
+          <a:bodyPr/>
+          <a:p/>
+        </p:txBody>
       </p:sp>
       <p:pic>
         <p:nvPicPr>
@@ -2955,6 +3019,10 @@
             </a:outerShdw>
           </a:effectLst>
         </p:spPr>
+        <p:txBody>
+          <a:bodyPr/>
+          <a:p/>
+        </p:txBody>
       </p:sp>
       <p:sp>
         <p:nvSpPr>
@@ -2975,6 +3043,10 @@
           </a:solidFill>
           <a:ln/>
         </p:spPr>
+        <p:txBody>
+          <a:bodyPr/>
+          <a:p/>
+        </p:txBody>
       </p:sp>
       <p:pic>
         <p:nvPicPr>
@@ -3132,6 +3204,10 @@
           </a:solidFill>
           <a:ln/>
         </p:spPr>
+        <p:txBody>
+          <a:bodyPr/>
+          <a:p/>
+        </p:txBody>
       </p:sp>
       <p:sp>
         <p:nvSpPr>
@@ -3284,6 +3360,10 @@
             </a:outerShdw>
           </a:effectLst>
         </p:spPr>
+        <p:txBody>
+          <a:bodyPr/>
+          <a:p/>
+        </p:txBody>
       </p:sp>
       <p:sp>
         <p:nvSpPr>
@@ -3304,6 +3384,10 @@
           </a:solidFill>
           <a:ln/>
         </p:spPr>
+        <p:txBody>
+          <a:bodyPr/>
+          <a:p/>
+        </p:txBody>
       </p:sp>
       <p:pic>
         <p:nvPicPr>
@@ -3441,6 +3525,10 @@
             </a:outerShdw>
           </a:effectLst>
         </p:spPr>
+        <p:txBody>
+          <a:bodyPr/>
+          <a:p/>
+        </p:txBody>
       </p:sp>
       <p:sp>
         <p:nvSpPr>
@@ -3461,6 +3549,10 @@
           </a:solidFill>
           <a:ln/>
         </p:spPr>
+        <p:txBody>
+          <a:bodyPr/>
+          <a:p/>
+        </p:txBody>
       </p:sp>
       <p:pic>
         <p:nvPicPr>
@@ -3598,6 +3690,10 @@
             </a:outerShdw>
           </a:effectLst>
         </p:spPr>
+        <p:txBody>
+          <a:bodyPr/>
+          <a:p/>
+        </p:txBody>
       </p:sp>
       <p:sp>
         <p:nvSpPr>
@@ -3618,6 +3714,10 @@
           </a:solidFill>
           <a:ln/>
         </p:spPr>
+        <p:txBody>
+          <a:bodyPr/>
+          <a:p/>
+        </p:txBody>
       </p:sp>
       <p:pic>
         <p:nvPicPr>
@@ -3755,6 +3855,10 @@
             </a:outerShdw>
           </a:effectLst>
         </p:spPr>
+        <p:txBody>
+          <a:bodyPr/>
+          <a:p/>
+        </p:txBody>
       </p:sp>
       <p:sp>
         <p:nvSpPr>
@@ -3775,6 +3879,10 @@
           </a:solidFill>
           <a:ln/>
         </p:spPr>
+        <p:txBody>
+          <a:bodyPr/>
+          <a:p/>
+        </p:txBody>
       </p:sp>
       <p:pic>
         <p:nvPicPr>
@@ -3932,6 +4040,10 @@
           </a:solidFill>
           <a:ln/>
         </p:spPr>
+        <p:txBody>
+          <a:bodyPr/>
+          <a:p/>
+        </p:txBody>
       </p:sp>
       <p:sp>
         <p:nvSpPr>
@@ -4005,7 +4117,7 @@
                 <a:ea typeface="Georgia" pitchFamily="34" charset="-122"/>
                 <a:cs typeface="Georgia" pitchFamily="34" charset="-120"/>
               </a:rPr>
-              <a:t>The mock interview and Big Interview</a:t>
+              <a:t>The mock interview and the AI Mock Interview</a:t>
             </a:r>
             <a:endParaRPr lang="en-US" sz="2800" dirty="0"/>
           </a:p>
@@ -4084,6 +4196,10 @@
             </a:outerShdw>
           </a:effectLst>
         </p:spPr>
+        <p:txBody>
+          <a:bodyPr/>
+          <a:p/>
+        </p:txBody>
       </p:sp>
       <p:sp>
         <p:nvSpPr>
@@ -4104,6 +4220,10 @@
           </a:solidFill>
           <a:ln/>
         </p:spPr>
+        <p:txBody>
+          <a:bodyPr/>
+          <a:p/>
+        </p:txBody>
       </p:sp>
       <p:sp>
         <p:nvSpPr>
@@ -4124,6 +4244,10 @@
           </a:solidFill>
           <a:ln/>
         </p:spPr>
+        <p:txBody>
+          <a:bodyPr/>
+          <a:p/>
+        </p:txBody>
       </p:sp>
       <p:pic>
         <p:nvPicPr>
@@ -4303,6 +4427,10 @@
             </a:outerShdw>
           </a:effectLst>
         </p:spPr>
+        <p:txBody>
+          <a:bodyPr/>
+          <a:p/>
+        </p:txBody>
       </p:sp>
       <p:sp>
         <p:nvSpPr>
@@ -4323,6 +4451,10 @@
           </a:solidFill>
           <a:ln/>
         </p:spPr>
+        <p:txBody>
+          <a:bodyPr/>
+          <a:p/>
+        </p:txBody>
       </p:sp>
       <p:sp>
         <p:nvSpPr>
@@ -4343,6 +4475,10 @@
           </a:solidFill>
           <a:ln/>
         </p:spPr>
+        <p:txBody>
+          <a:bodyPr/>
+          <a:p/>
+        </p:txBody>
       </p:sp>
       <p:pic>
         <p:nvPicPr>
@@ -4542,6 +4678,10 @@
           </a:solidFill>
           <a:ln/>
         </p:spPr>
+        <p:txBody>
+          <a:bodyPr/>
+          <a:p/>
+        </p:txBody>
       </p:sp>
       <p:sp>
         <p:nvSpPr>
@@ -4694,6 +4834,10 @@
             </a:outerShdw>
           </a:effectLst>
         </p:spPr>
+        <p:txBody>
+          <a:bodyPr/>
+          <a:p/>
+        </p:txBody>
       </p:sp>
       <p:sp>
         <p:nvSpPr>
@@ -4714,6 +4858,10 @@
           </a:solidFill>
           <a:ln/>
         </p:spPr>
+        <p:txBody>
+          <a:bodyPr/>
+          <a:p/>
+        </p:txBody>
       </p:sp>
       <p:pic>
         <p:nvPicPr>
@@ -4851,6 +4999,10 @@
             </a:outerShdw>
           </a:effectLst>
         </p:spPr>
+        <p:txBody>
+          <a:bodyPr/>
+          <a:p/>
+        </p:txBody>
       </p:sp>
       <p:sp>
         <p:nvSpPr>
@@ -4871,6 +5023,10 @@
           </a:solidFill>
           <a:ln/>
         </p:spPr>
+        <p:txBody>
+          <a:bodyPr/>
+          <a:p/>
+        </p:txBody>
       </p:sp>
       <p:pic>
         <p:nvPicPr>
@@ -5008,6 +5164,10 @@
             </a:outerShdw>
           </a:effectLst>
         </p:spPr>
+        <p:txBody>
+          <a:bodyPr/>
+          <a:p/>
+        </p:txBody>
       </p:sp>
       <p:sp>
         <p:nvSpPr>
@@ -5028,6 +5188,10 @@
           </a:solidFill>
           <a:ln/>
         </p:spPr>
+        <p:txBody>
+          <a:bodyPr/>
+          <a:p/>
+        </p:txBody>
       </p:sp>
       <p:pic>
         <p:nvPicPr>
@@ -5165,6 +5329,10 @@
             </a:outerShdw>
           </a:effectLst>
         </p:spPr>
+        <p:txBody>
+          <a:bodyPr/>
+          <a:p/>
+        </p:txBody>
       </p:sp>
       <p:sp>
         <p:nvSpPr>
@@ -5185,6 +5353,10 @@
           </a:solidFill>
           <a:ln/>
         </p:spPr>
+        <p:txBody>
+          <a:bodyPr/>
+          <a:p/>
+        </p:txBody>
       </p:sp>
       <p:pic>
         <p:nvPicPr>
@@ -5342,6 +5514,10 @@
           </a:solidFill>
           <a:ln/>
         </p:spPr>
+        <p:txBody>
+          <a:bodyPr/>
+          <a:p/>
+        </p:txBody>
       </p:sp>
       <p:sp>
         <p:nvSpPr>
@@ -5494,6 +5670,10 @@
             </a:outerShdw>
           </a:effectLst>
         </p:spPr>
+        <p:txBody>
+          <a:bodyPr/>
+          <a:p/>
+        </p:txBody>
       </p:sp>
       <p:sp>
         <p:nvSpPr>
@@ -5514,6 +5694,10 @@
           </a:solidFill>
           <a:ln/>
         </p:spPr>
+        <p:txBody>
+          <a:bodyPr/>
+          <a:p/>
+        </p:txBody>
       </p:sp>
       <p:sp>
         <p:nvSpPr>
@@ -5534,6 +5718,10 @@
           </a:solidFill>
           <a:ln/>
         </p:spPr>
+        <p:txBody>
+          <a:bodyPr/>
+          <a:p/>
+        </p:txBody>
       </p:sp>
       <p:pic>
         <p:nvPicPr>
@@ -5713,6 +5901,10 @@
             </a:outerShdw>
           </a:effectLst>
         </p:spPr>
+        <p:txBody>
+          <a:bodyPr/>
+          <a:p/>
+        </p:txBody>
       </p:sp>
       <p:sp>
         <p:nvSpPr>
@@ -5733,6 +5925,10 @@
           </a:solidFill>
           <a:ln/>
         </p:spPr>
+        <p:txBody>
+          <a:bodyPr/>
+          <a:p/>
+        </p:txBody>
       </p:sp>
       <p:sp>
         <p:nvSpPr>
@@ -5753,6 +5949,10 @@
           </a:solidFill>
           <a:ln/>
         </p:spPr>
+        <p:txBody>
+          <a:bodyPr/>
+          <a:p/>
+        </p:txBody>
       </p:sp>
       <p:pic>
         <p:nvPicPr>
@@ -5952,6 +6152,10 @@
           </a:solidFill>
           <a:ln/>
         </p:spPr>
+        <p:txBody>
+          <a:bodyPr/>
+          <a:p/>
+        </p:txBody>
       </p:sp>
       <p:sp>
         <p:nvSpPr>
@@ -6104,6 +6308,10 @@
             </a:outerShdw>
           </a:effectLst>
         </p:spPr>
+        <p:txBody>
+          <a:bodyPr/>
+          <a:p/>
+        </p:txBody>
       </p:sp>
       <p:sp>
         <p:nvSpPr>
@@ -6124,6 +6332,10 @@
           </a:solidFill>
           <a:ln/>
         </p:spPr>
+        <p:txBody>
+          <a:bodyPr/>
+          <a:p/>
+        </p:txBody>
       </p:sp>
       <p:pic>
         <p:nvPicPr>
@@ -6261,6 +6473,10 @@
             </a:outerShdw>
           </a:effectLst>
         </p:spPr>
+        <p:txBody>
+          <a:bodyPr/>
+          <a:p/>
+        </p:txBody>
       </p:sp>
       <p:sp>
         <p:nvSpPr>
@@ -6281,6 +6497,10 @@
           </a:solidFill>
           <a:ln/>
         </p:spPr>
+        <p:txBody>
+          <a:bodyPr/>
+          <a:p/>
+        </p:txBody>
       </p:sp>
       <p:pic>
         <p:nvPicPr>
@@ -6418,6 +6638,10 @@
             </a:outerShdw>
           </a:effectLst>
         </p:spPr>
+        <p:txBody>
+          <a:bodyPr/>
+          <a:p/>
+        </p:txBody>
       </p:sp>
       <p:sp>
         <p:nvSpPr>
@@ -6438,6 +6662,10 @@
           </a:solidFill>
           <a:ln/>
         </p:spPr>
+        <p:txBody>
+          <a:bodyPr/>
+          <a:p/>
+        </p:txBody>
       </p:sp>
       <p:pic>
         <p:nvPicPr>
@@ -6595,6 +6823,10 @@
           </a:solidFill>
           <a:ln/>
         </p:spPr>
+        <p:txBody>
+          <a:bodyPr/>
+          <a:p/>
+        </p:txBody>
       </p:sp>
       <p:sp>
         <p:nvSpPr>
@@ -6615,6 +6847,10 @@
           </a:solidFill>
           <a:ln/>
         </p:spPr>
+        <p:txBody>
+          <a:bodyPr/>
+          <a:p/>
+        </p:txBody>
       </p:sp>
       <p:sp>
         <p:nvSpPr>
@@ -6635,6 +6871,10 @@
           </a:solidFill>
           <a:ln/>
         </p:spPr>
+        <p:txBody>
+          <a:bodyPr/>
+          <a:p/>
+        </p:txBody>
       </p:sp>
       <p:sp>
         <p:nvSpPr>
